--- a/Text-to-SQL/slides/hard_failures.pptx
+++ b/Text-to-SQL/slides/hard_failures.pptx
@@ -3085,6 +3085,14 @@
 <file path=ppt/slides/slide1.xml><?xml version="1.0" encoding="utf-8"?>
 <p:sld xmlns:a="http://schemas.openxmlformats.org/drawingml/2006/main" xmlns:p="http://schemas.openxmlformats.org/presentationml/2006/main" xmlns:r="http://schemas.openxmlformats.org/officeDocument/2006/relationships">
   <p:cSld>
+    <p:bg>
+      <p:bgPr>
+        <a:solidFill>
+          <a:srgbClr val="0D1117"/>
+        </a:solidFill>
+        <a:effectLst/>
+      </p:bgPr>
+    </p:bg>
     <p:spTree>
       <p:nvGrpSpPr>
         <p:cNvPr id="1" name=""/>
@@ -3094,14 +3102,102 @@
       <p:grpSpPr/>
       <p:sp>
         <p:nvSpPr>
-          <p:cNvPr id="2" name="TextBox 1"/>
+          <p:cNvPr id="2" name="Rectangle 1"/>
+          <p:cNvSpPr/>
+          <p:nvPr/>
+        </p:nvSpPr>
+        <p:spPr>
+          <a:xfrm>
+            <a:off x="0" y="0"/>
+            <a:ext cx="9144000" cy="73152"/>
+          </a:xfrm>
+          <a:prstGeom prst="rect">
+            <a:avLst/>
+          </a:prstGeom>
+          <a:solidFill>
+            <a:srgbClr val="F7931A"/>
+          </a:solidFill>
+          <a:ln>
+            <a:noFill/>
+          </a:ln>
+        </p:spPr>
+        <p:style>
+          <a:lnRef idx="1">
+            <a:schemeClr val="accent1"/>
+          </a:lnRef>
+          <a:fillRef idx="3">
+            <a:schemeClr val="accent1"/>
+          </a:fillRef>
+          <a:effectRef idx="2">
+            <a:schemeClr val="accent1"/>
+          </a:effectRef>
+          <a:fontRef idx="minor">
+            <a:schemeClr val="lt1"/>
+          </a:fontRef>
+        </p:style>
+        <p:txBody>
+          <a:bodyPr rtlCol="0" anchor="ctr"/>
+          <a:lstStyle/>
+          <a:p>
+            <a:pPr algn="ctr"/>
+          </a:p>
+        </p:txBody>
+      </p:sp>
+      <p:sp>
+        <p:nvSpPr>
+          <p:cNvPr id="3" name="Rounded Rectangle 2"/>
+          <p:cNvSpPr/>
+          <p:nvPr/>
+        </p:nvSpPr>
+        <p:spPr>
+          <a:xfrm>
+            <a:off x="502920" y="1051560"/>
+            <a:ext cx="8138160" cy="4206240"/>
+          </a:xfrm>
+          <a:prstGeom prst="roundRect">
+            <a:avLst/>
+          </a:prstGeom>
+          <a:solidFill>
+            <a:srgbClr val="161B22"/>
+          </a:solidFill>
+          <a:ln w="12700">
+            <a:solidFill>
+              <a:srgbClr val="30363D"/>
+            </a:solidFill>
+          </a:ln>
+        </p:spPr>
+        <p:style>
+          <a:lnRef idx="1">
+            <a:schemeClr val="accent1"/>
+          </a:lnRef>
+          <a:fillRef idx="3">
+            <a:schemeClr val="accent1"/>
+          </a:fillRef>
+          <a:effectRef idx="2">
+            <a:schemeClr val="accent1"/>
+          </a:effectRef>
+          <a:fontRef idx="minor">
+            <a:schemeClr val="lt1"/>
+          </a:fontRef>
+        </p:style>
+        <p:txBody>
+          <a:bodyPr rtlCol="0" anchor="ctr"/>
+          <a:lstStyle/>
+          <a:p>
+            <a:pPr algn="ctr"/>
+          </a:p>
+        </p:txBody>
+      </p:sp>
+      <p:sp>
+        <p:nvSpPr>
+          <p:cNvPr id="4" name="TextBox 3"/>
           <p:cNvSpPr txBox="1"/>
           <p:nvPr/>
         </p:nvSpPr>
         <p:spPr>
           <a:xfrm>
-            <a:off x="640080" y="1280160"/>
-            <a:ext cx="7863840" cy="3657600"/>
+            <a:off x="777240" y="1325880"/>
+            <a:ext cx="7589520" cy="3657600"/>
           </a:xfrm>
           <a:prstGeom prst="rect">
             <a:avLst/>
@@ -3115,7 +3211,7 @@
           <a:lstStyle/>
           <a:p>
             <a:pPr>
-              <a:defRPr sz="4000" b="1">
+              <a:defRPr sz="4400" b="1">
                 <a:solidFill>
                   <a:srgbClr val="E6EDF3"/>
                 </a:solidFill>
@@ -3128,9 +3224,9 @@
           <a:p>
             <a:pPr>
               <a:spcBef>
-                <a:spcPts val="1200"/>
+                <a:spcPts val="1400"/>
               </a:spcBef>
-              <a:defRPr sz="2000">
+              <a:defRPr sz="2200">
                 <a:solidFill>
                   <a:srgbClr val="F7931A"/>
                 </a:solidFill>
@@ -3143,7 +3239,7 @@
           <a:p>
             <a:pPr>
               <a:spcBef>
-                <a:spcPts val="1200"/>
+                <a:spcPts val="1400"/>
               </a:spcBef>
               <a:defRPr sz="1800">
                 <a:solidFill>
@@ -3158,9 +3254,9 @@
           <a:p>
             <a:pPr>
               <a:spcBef>
-                <a:spcPts val="1200"/>
+                <a:spcPts val="1400"/>
               </a:spcBef>
-              <a:defRPr sz="1400">
+              <a:defRPr sz="1500">
                 <a:solidFill>
                   <a:srgbClr val="8B949E"/>
                 </a:solidFill>
@@ -3173,9 +3269,9 @@
           <a:p>
             <a:pPr>
               <a:spcBef>
-                <a:spcPts val="1200"/>
+                <a:spcPts val="1400"/>
               </a:spcBef>
-              <a:defRPr sz="1400">
+              <a:defRPr sz="1500">
                 <a:solidFill>
                   <a:srgbClr val="8B949E"/>
                 </a:solidFill>
@@ -3198,6 +3294,14 @@
 <file path=ppt/slides/slide2.xml><?xml version="1.0" encoding="utf-8"?>
 <p:sld xmlns:a="http://schemas.openxmlformats.org/drawingml/2006/main" xmlns:p="http://schemas.openxmlformats.org/presentationml/2006/main" xmlns:r="http://schemas.openxmlformats.org/officeDocument/2006/relationships">
   <p:cSld>
+    <p:bg>
+      <p:bgPr>
+        <a:solidFill>
+          <a:srgbClr val="0D1117"/>
+        </a:solidFill>
+        <a:effectLst/>
+      </p:bgPr>
+    </p:bg>
     <p:spTree>
       <p:nvGrpSpPr>
         <p:cNvPr id="1" name=""/>
@@ -3207,14 +3311,57 @@
       <p:grpSpPr/>
       <p:sp>
         <p:nvSpPr>
-          <p:cNvPr id="2" name="TextBox 1"/>
+          <p:cNvPr id="2" name="Rectangle 1"/>
+          <p:cNvSpPr/>
+          <p:nvPr/>
+        </p:nvSpPr>
+        <p:spPr>
+          <a:xfrm>
+            <a:off x="0" y="0"/>
+            <a:ext cx="9144000" cy="73152"/>
+          </a:xfrm>
+          <a:prstGeom prst="rect">
+            <a:avLst/>
+          </a:prstGeom>
+          <a:solidFill>
+            <a:srgbClr val="F7931A"/>
+          </a:solidFill>
+          <a:ln>
+            <a:noFill/>
+          </a:ln>
+        </p:spPr>
+        <p:style>
+          <a:lnRef idx="1">
+            <a:schemeClr val="accent1"/>
+          </a:lnRef>
+          <a:fillRef idx="3">
+            <a:schemeClr val="accent1"/>
+          </a:fillRef>
+          <a:effectRef idx="2">
+            <a:schemeClr val="accent1"/>
+          </a:effectRef>
+          <a:fontRef idx="minor">
+            <a:schemeClr val="lt1"/>
+          </a:fontRef>
+        </p:style>
+        <p:txBody>
+          <a:bodyPr rtlCol="0" anchor="ctr"/>
+          <a:lstStyle/>
+          <a:p>
+            <a:pPr algn="ctr"/>
+          </a:p>
+        </p:txBody>
+      </p:sp>
+      <p:sp>
+        <p:nvSpPr>
+          <p:cNvPr id="3" name="TextBox 2"/>
           <p:cNvSpPr txBox="1"/>
           <p:nvPr/>
         </p:nvSpPr>
         <p:spPr>
           <a:xfrm>
-            <a:off x="457200" y="228600"/>
-            <a:ext cx="8229600" cy="548640"/>
+            <a:off x="457200" y="201168"/>
+            <a:ext cx="8229600" cy="502920"/>
           </a:xfrm>
           <a:prstGeom prst="rect">
             <a:avLst/>
@@ -3228,7 +3375,7 @@
           <a:lstStyle/>
           <a:p>
             <a:pPr>
-              <a:defRPr sz="2800" b="1">
+              <a:defRPr sz="3000" b="1">
                 <a:solidFill>
                   <a:srgbClr val="F7931A"/>
                 </a:solidFill>
@@ -3242,14 +3389,59 @@
       </p:sp>
       <p:sp>
         <p:nvSpPr>
-          <p:cNvPr id="3" name="TextBox 2"/>
+          <p:cNvPr id="4" name="Rounded Rectangle 3"/>
+          <p:cNvSpPr/>
+          <p:nvPr/>
+        </p:nvSpPr>
+        <p:spPr>
+          <a:xfrm>
+            <a:off x="411480" y="713232"/>
+            <a:ext cx="8321040" cy="658368"/>
+          </a:xfrm>
+          <a:prstGeom prst="roundRect">
+            <a:avLst/>
+          </a:prstGeom>
+          <a:solidFill>
+            <a:srgbClr val="161B22"/>
+          </a:solidFill>
+          <a:ln w="12700">
+            <a:solidFill>
+              <a:srgbClr val="30363D"/>
+            </a:solidFill>
+          </a:ln>
+        </p:spPr>
+        <p:style>
+          <a:lnRef idx="1">
+            <a:schemeClr val="accent1"/>
+          </a:lnRef>
+          <a:fillRef idx="3">
+            <a:schemeClr val="accent1"/>
+          </a:fillRef>
+          <a:effectRef idx="2">
+            <a:schemeClr val="accent1"/>
+          </a:effectRef>
+          <a:fontRef idx="minor">
+            <a:schemeClr val="lt1"/>
+          </a:fontRef>
+        </p:style>
+        <p:txBody>
+          <a:bodyPr rtlCol="0" anchor="ctr"/>
+          <a:lstStyle/>
+          <a:p>
+            <a:pPr algn="ctr"/>
+          </a:p>
+        </p:txBody>
+      </p:sp>
+      <p:sp>
+        <p:nvSpPr>
+          <p:cNvPr id="5" name="TextBox 4"/>
           <p:cNvSpPr txBox="1"/>
           <p:nvPr/>
         </p:nvSpPr>
         <p:spPr>
           <a:xfrm>
-            <a:off x="457200" y="777240"/>
-            <a:ext cx="8229600" cy="640080"/>
+            <a:off x="594360" y="841248"/>
+            <a:ext cx="7955279" cy="502920"/>
           </a:xfrm>
           <a:prstGeom prst="rect">
             <a:avLst/>
@@ -3263,7 +3455,7 @@
           <a:lstStyle/>
           <a:p>
             <a:pPr>
-              <a:defRPr sz="1600" b="1">
+              <a:defRPr sz="1700" b="1">
                 <a:solidFill>
                   <a:srgbClr val="E6EDF3"/>
                 </a:solidFill>
@@ -3277,7 +3469,7 @@
       </p:sp>
       <p:pic>
         <p:nvPicPr>
-          <p:cNvPr id="4" name="Picture 3" descr="case1_column_selection.png"/>
+          <p:cNvPr id="6" name="Picture 5" descr="case1_column_selection.png"/>
           <p:cNvPicPr>
             <a:picLocks noChangeAspect="1"/>
           </p:cNvPicPr>
@@ -3291,7 +3483,7 @@
         </p:blipFill>
         <p:spPr>
           <a:xfrm>
-            <a:off x="320040" y="1417320"/>
+            <a:off x="320040" y="1481328"/>
             <a:ext cx="8503920" cy="2179130"/>
           </a:xfrm>
           <a:prstGeom prst="rect">
@@ -3301,14 +3493,59 @@
       </p:pic>
       <p:sp>
         <p:nvSpPr>
-          <p:cNvPr id="5" name="TextBox 4"/>
+          <p:cNvPr id="7" name="Rounded Rectangle 6"/>
+          <p:cNvSpPr/>
+          <p:nvPr/>
+        </p:nvSpPr>
+        <p:spPr>
+          <a:xfrm>
+            <a:off x="411480" y="4617720"/>
+            <a:ext cx="8321040" cy="868680"/>
+          </a:xfrm>
+          <a:prstGeom prst="roundRect">
+            <a:avLst/>
+          </a:prstGeom>
+          <a:solidFill>
+            <a:srgbClr val="161B22"/>
+          </a:solidFill>
+          <a:ln w="12700">
+            <a:solidFill>
+              <a:srgbClr val="30363D"/>
+            </a:solidFill>
+          </a:ln>
+        </p:spPr>
+        <p:style>
+          <a:lnRef idx="1">
+            <a:schemeClr val="accent1"/>
+          </a:lnRef>
+          <a:fillRef idx="3">
+            <a:schemeClr val="accent1"/>
+          </a:fillRef>
+          <a:effectRef idx="2">
+            <a:schemeClr val="accent1"/>
+          </a:effectRef>
+          <a:fontRef idx="minor">
+            <a:schemeClr val="lt1"/>
+          </a:fontRef>
+        </p:style>
+        <p:txBody>
+          <a:bodyPr rtlCol="0" anchor="ctr"/>
+          <a:lstStyle/>
+          <a:p>
+            <a:pPr algn="ctr"/>
+          </a:p>
+        </p:txBody>
+      </p:sp>
+      <p:sp>
+        <p:nvSpPr>
+          <p:cNvPr id="8" name="TextBox 7"/>
           <p:cNvSpPr txBox="1"/>
           <p:nvPr/>
         </p:nvSpPr>
         <p:spPr>
           <a:xfrm>
-            <a:off x="457200" y="4709160"/>
-            <a:ext cx="8229600" cy="731520"/>
+            <a:off x="594360" y="4754880"/>
+            <a:ext cx="7955279" cy="685800"/>
           </a:xfrm>
           <a:prstGeom prst="rect">
             <a:avLst/>
@@ -3322,7 +3559,7 @@
           <a:lstStyle/>
           <a:p>
             <a:pPr>
-              <a:defRPr sz="1400">
+              <a:defRPr sz="1500" b="0">
                 <a:solidFill>
                   <a:srgbClr val="8B949E"/>
                 </a:solidFill>
@@ -3345,6 +3582,14 @@
 <file path=ppt/slides/slide3.xml><?xml version="1.0" encoding="utf-8"?>
 <p:sld xmlns:a="http://schemas.openxmlformats.org/drawingml/2006/main" xmlns:p="http://schemas.openxmlformats.org/presentationml/2006/main" xmlns:r="http://schemas.openxmlformats.org/officeDocument/2006/relationships">
   <p:cSld>
+    <p:bg>
+      <p:bgPr>
+        <a:solidFill>
+          <a:srgbClr val="0D1117"/>
+        </a:solidFill>
+        <a:effectLst/>
+      </p:bgPr>
+    </p:bg>
     <p:spTree>
       <p:nvGrpSpPr>
         <p:cNvPr id="1" name=""/>
@@ -3354,14 +3599,57 @@
       <p:grpSpPr/>
       <p:sp>
         <p:nvSpPr>
-          <p:cNvPr id="2" name="TextBox 1"/>
+          <p:cNvPr id="2" name="Rectangle 1"/>
+          <p:cNvSpPr/>
+          <p:nvPr/>
+        </p:nvSpPr>
+        <p:spPr>
+          <a:xfrm>
+            <a:off x="0" y="0"/>
+            <a:ext cx="9144000" cy="73152"/>
+          </a:xfrm>
+          <a:prstGeom prst="rect">
+            <a:avLst/>
+          </a:prstGeom>
+          <a:solidFill>
+            <a:srgbClr val="F7931A"/>
+          </a:solidFill>
+          <a:ln>
+            <a:noFill/>
+          </a:ln>
+        </p:spPr>
+        <p:style>
+          <a:lnRef idx="1">
+            <a:schemeClr val="accent1"/>
+          </a:lnRef>
+          <a:fillRef idx="3">
+            <a:schemeClr val="accent1"/>
+          </a:fillRef>
+          <a:effectRef idx="2">
+            <a:schemeClr val="accent1"/>
+          </a:effectRef>
+          <a:fontRef idx="minor">
+            <a:schemeClr val="lt1"/>
+          </a:fontRef>
+        </p:style>
+        <p:txBody>
+          <a:bodyPr rtlCol="0" anchor="ctr"/>
+          <a:lstStyle/>
+          <a:p>
+            <a:pPr algn="ctr"/>
+          </a:p>
+        </p:txBody>
+      </p:sp>
+      <p:sp>
+        <p:nvSpPr>
+          <p:cNvPr id="3" name="TextBox 2"/>
           <p:cNvSpPr txBox="1"/>
           <p:nvPr/>
         </p:nvSpPr>
         <p:spPr>
           <a:xfrm>
-            <a:off x="457200" y="228600"/>
-            <a:ext cx="8229600" cy="548640"/>
+            <a:off x="457200" y="201168"/>
+            <a:ext cx="8229600" cy="502920"/>
           </a:xfrm>
           <a:prstGeom prst="rect">
             <a:avLst/>
@@ -3375,7 +3663,7 @@
           <a:lstStyle/>
           <a:p>
             <a:pPr>
-              <a:defRPr sz="2800" b="1">
+              <a:defRPr sz="3000" b="1">
                 <a:solidFill>
                   <a:srgbClr val="F7931A"/>
                 </a:solidFill>
@@ -3389,14 +3677,59 @@
       </p:sp>
       <p:sp>
         <p:nvSpPr>
-          <p:cNvPr id="3" name="TextBox 2"/>
+          <p:cNvPr id="4" name="Rounded Rectangle 3"/>
+          <p:cNvSpPr/>
+          <p:nvPr/>
+        </p:nvSpPr>
+        <p:spPr>
+          <a:xfrm>
+            <a:off x="411480" y="713232"/>
+            <a:ext cx="8321040" cy="658368"/>
+          </a:xfrm>
+          <a:prstGeom prst="roundRect">
+            <a:avLst/>
+          </a:prstGeom>
+          <a:solidFill>
+            <a:srgbClr val="161B22"/>
+          </a:solidFill>
+          <a:ln w="12700">
+            <a:solidFill>
+              <a:srgbClr val="30363D"/>
+            </a:solidFill>
+          </a:ln>
+        </p:spPr>
+        <p:style>
+          <a:lnRef idx="1">
+            <a:schemeClr val="accent1"/>
+          </a:lnRef>
+          <a:fillRef idx="3">
+            <a:schemeClr val="accent1"/>
+          </a:fillRef>
+          <a:effectRef idx="2">
+            <a:schemeClr val="accent1"/>
+          </a:effectRef>
+          <a:fontRef idx="minor">
+            <a:schemeClr val="lt1"/>
+          </a:fontRef>
+        </p:style>
+        <p:txBody>
+          <a:bodyPr rtlCol="0" anchor="ctr"/>
+          <a:lstStyle/>
+          <a:p>
+            <a:pPr algn="ctr"/>
+          </a:p>
+        </p:txBody>
+      </p:sp>
+      <p:sp>
+        <p:nvSpPr>
+          <p:cNvPr id="5" name="TextBox 4"/>
           <p:cNvSpPr txBox="1"/>
           <p:nvPr/>
         </p:nvSpPr>
         <p:spPr>
           <a:xfrm>
-            <a:off x="457200" y="777240"/>
-            <a:ext cx="8229600" cy="640080"/>
+            <a:off x="594360" y="841248"/>
+            <a:ext cx="7955279" cy="502920"/>
           </a:xfrm>
           <a:prstGeom prst="rect">
             <a:avLst/>
@@ -3410,7 +3743,7 @@
           <a:lstStyle/>
           <a:p>
             <a:pPr>
-              <a:defRPr sz="1600" b="1">
+              <a:defRPr sz="1700" b="1">
                 <a:solidFill>
                   <a:srgbClr val="E6EDF3"/>
                 </a:solidFill>
@@ -3424,7 +3757,7 @@
       </p:sp>
       <p:pic>
         <p:nvPicPr>
-          <p:cNvPr id="4" name="Picture 3" descr="case2_aggregation.png"/>
+          <p:cNvPr id="6" name="Picture 5" descr="case2_aggregation.png"/>
           <p:cNvPicPr>
             <a:picLocks noChangeAspect="1"/>
           </p:cNvPicPr>
@@ -3438,7 +3771,7 @@
         </p:blipFill>
         <p:spPr>
           <a:xfrm>
-            <a:off x="320040" y="1417320"/>
+            <a:off x="320040" y="1481328"/>
             <a:ext cx="8503920" cy="2365153"/>
           </a:xfrm>
           <a:prstGeom prst="rect">
@@ -3448,14 +3781,59 @@
       </p:pic>
       <p:sp>
         <p:nvSpPr>
-          <p:cNvPr id="5" name="TextBox 4"/>
+          <p:cNvPr id="7" name="Rounded Rectangle 6"/>
+          <p:cNvSpPr/>
+          <p:nvPr/>
+        </p:nvSpPr>
+        <p:spPr>
+          <a:xfrm>
+            <a:off x="411480" y="4617720"/>
+            <a:ext cx="8321040" cy="868680"/>
+          </a:xfrm>
+          <a:prstGeom prst="roundRect">
+            <a:avLst/>
+          </a:prstGeom>
+          <a:solidFill>
+            <a:srgbClr val="161B22"/>
+          </a:solidFill>
+          <a:ln w="12700">
+            <a:solidFill>
+              <a:srgbClr val="30363D"/>
+            </a:solidFill>
+          </a:ln>
+        </p:spPr>
+        <p:style>
+          <a:lnRef idx="1">
+            <a:schemeClr val="accent1"/>
+          </a:lnRef>
+          <a:fillRef idx="3">
+            <a:schemeClr val="accent1"/>
+          </a:fillRef>
+          <a:effectRef idx="2">
+            <a:schemeClr val="accent1"/>
+          </a:effectRef>
+          <a:fontRef idx="minor">
+            <a:schemeClr val="lt1"/>
+          </a:fontRef>
+        </p:style>
+        <p:txBody>
+          <a:bodyPr rtlCol="0" anchor="ctr"/>
+          <a:lstStyle/>
+          <a:p>
+            <a:pPr algn="ctr"/>
+          </a:p>
+        </p:txBody>
+      </p:sp>
+      <p:sp>
+        <p:nvSpPr>
+          <p:cNvPr id="8" name="TextBox 7"/>
           <p:cNvSpPr txBox="1"/>
           <p:nvPr/>
         </p:nvSpPr>
         <p:spPr>
           <a:xfrm>
-            <a:off x="457200" y="4709160"/>
-            <a:ext cx="8229600" cy="731520"/>
+            <a:off x="594360" y="4754880"/>
+            <a:ext cx="7955279" cy="685800"/>
           </a:xfrm>
           <a:prstGeom prst="rect">
             <a:avLst/>
@@ -3469,7 +3847,7 @@
           <a:lstStyle/>
           <a:p>
             <a:pPr>
-              <a:defRPr sz="1400">
+              <a:defRPr sz="1500" b="0">
                 <a:solidFill>
                   <a:srgbClr val="8B949E"/>
                 </a:solidFill>
@@ -3492,6 +3870,14 @@
 <file path=ppt/slides/slide4.xml><?xml version="1.0" encoding="utf-8"?>
 <p:sld xmlns:a="http://schemas.openxmlformats.org/drawingml/2006/main" xmlns:p="http://schemas.openxmlformats.org/presentationml/2006/main" xmlns:r="http://schemas.openxmlformats.org/officeDocument/2006/relationships">
   <p:cSld>
+    <p:bg>
+      <p:bgPr>
+        <a:solidFill>
+          <a:srgbClr val="0D1117"/>
+        </a:solidFill>
+        <a:effectLst/>
+      </p:bgPr>
+    </p:bg>
     <p:spTree>
       <p:nvGrpSpPr>
         <p:cNvPr id="1" name=""/>
@@ -3501,14 +3887,57 @@
       <p:grpSpPr/>
       <p:sp>
         <p:nvSpPr>
-          <p:cNvPr id="2" name="TextBox 1"/>
+          <p:cNvPr id="2" name="Rectangle 1"/>
+          <p:cNvSpPr/>
+          <p:nvPr/>
+        </p:nvSpPr>
+        <p:spPr>
+          <a:xfrm>
+            <a:off x="0" y="0"/>
+            <a:ext cx="9144000" cy="73152"/>
+          </a:xfrm>
+          <a:prstGeom prst="rect">
+            <a:avLst/>
+          </a:prstGeom>
+          <a:solidFill>
+            <a:srgbClr val="F7931A"/>
+          </a:solidFill>
+          <a:ln>
+            <a:noFill/>
+          </a:ln>
+        </p:spPr>
+        <p:style>
+          <a:lnRef idx="1">
+            <a:schemeClr val="accent1"/>
+          </a:lnRef>
+          <a:fillRef idx="3">
+            <a:schemeClr val="accent1"/>
+          </a:fillRef>
+          <a:effectRef idx="2">
+            <a:schemeClr val="accent1"/>
+          </a:effectRef>
+          <a:fontRef idx="minor">
+            <a:schemeClr val="lt1"/>
+          </a:fontRef>
+        </p:style>
+        <p:txBody>
+          <a:bodyPr rtlCol="0" anchor="ctr"/>
+          <a:lstStyle/>
+          <a:p>
+            <a:pPr algn="ctr"/>
+          </a:p>
+        </p:txBody>
+      </p:sp>
+      <p:sp>
+        <p:nvSpPr>
+          <p:cNvPr id="3" name="TextBox 2"/>
           <p:cNvSpPr txBox="1"/>
           <p:nvPr/>
         </p:nvSpPr>
         <p:spPr>
           <a:xfrm>
-            <a:off x="457200" y="228600"/>
-            <a:ext cx="8229600" cy="548640"/>
+            <a:off x="457200" y="201168"/>
+            <a:ext cx="8229600" cy="502920"/>
           </a:xfrm>
           <a:prstGeom prst="rect">
             <a:avLst/>
@@ -3522,7 +3951,7 @@
           <a:lstStyle/>
           <a:p>
             <a:pPr>
-              <a:defRPr sz="2800" b="1">
+              <a:defRPr sz="3000" b="1">
                 <a:solidFill>
                   <a:srgbClr val="F7931A"/>
                 </a:solidFill>
@@ -3536,14 +3965,59 @@
       </p:sp>
       <p:sp>
         <p:nvSpPr>
-          <p:cNvPr id="3" name="TextBox 2"/>
+          <p:cNvPr id="4" name="Rounded Rectangle 3"/>
+          <p:cNvSpPr/>
+          <p:nvPr/>
+        </p:nvSpPr>
+        <p:spPr>
+          <a:xfrm>
+            <a:off x="411480" y="713232"/>
+            <a:ext cx="8321040" cy="658368"/>
+          </a:xfrm>
+          <a:prstGeom prst="roundRect">
+            <a:avLst/>
+          </a:prstGeom>
+          <a:solidFill>
+            <a:srgbClr val="161B22"/>
+          </a:solidFill>
+          <a:ln w="12700">
+            <a:solidFill>
+              <a:srgbClr val="30363D"/>
+            </a:solidFill>
+          </a:ln>
+        </p:spPr>
+        <p:style>
+          <a:lnRef idx="1">
+            <a:schemeClr val="accent1"/>
+          </a:lnRef>
+          <a:fillRef idx="3">
+            <a:schemeClr val="accent1"/>
+          </a:fillRef>
+          <a:effectRef idx="2">
+            <a:schemeClr val="accent1"/>
+          </a:effectRef>
+          <a:fontRef idx="minor">
+            <a:schemeClr val="lt1"/>
+          </a:fontRef>
+        </p:style>
+        <p:txBody>
+          <a:bodyPr rtlCol="0" anchor="ctr"/>
+          <a:lstStyle/>
+          <a:p>
+            <a:pPr algn="ctr"/>
+          </a:p>
+        </p:txBody>
+      </p:sp>
+      <p:sp>
+        <p:nvSpPr>
+          <p:cNvPr id="5" name="TextBox 4"/>
           <p:cNvSpPr txBox="1"/>
           <p:nvPr/>
         </p:nvSpPr>
         <p:spPr>
           <a:xfrm>
-            <a:off x="457200" y="777240"/>
-            <a:ext cx="8229600" cy="640080"/>
+            <a:off x="594360" y="841248"/>
+            <a:ext cx="7955279" cy="502920"/>
           </a:xfrm>
           <a:prstGeom prst="rect">
             <a:avLst/>
@@ -3557,7 +4031,7 @@
           <a:lstStyle/>
           <a:p>
             <a:pPr>
-              <a:defRPr sz="1600" b="1">
+              <a:defRPr sz="1700" b="1">
                 <a:solidFill>
                   <a:srgbClr val="E6EDF3"/>
                 </a:solidFill>
@@ -3571,7 +4045,7 @@
       </p:sp>
       <p:pic>
         <p:nvPicPr>
-          <p:cNvPr id="4" name="Picture 3" descr="case3_script_types.png"/>
+          <p:cNvPr id="6" name="Picture 5" descr="case3_script_types.png"/>
           <p:cNvPicPr>
             <a:picLocks noChangeAspect="1"/>
           </p:cNvPicPr>
@@ -3585,7 +4059,7 @@
         </p:blipFill>
         <p:spPr>
           <a:xfrm>
-            <a:off x="320040" y="1417320"/>
+            <a:off x="320040" y="1481328"/>
             <a:ext cx="8503920" cy="2365153"/>
           </a:xfrm>
           <a:prstGeom prst="rect">
@@ -3595,14 +4069,59 @@
       </p:pic>
       <p:sp>
         <p:nvSpPr>
-          <p:cNvPr id="5" name="TextBox 4"/>
+          <p:cNvPr id="7" name="Rounded Rectangle 6"/>
+          <p:cNvSpPr/>
+          <p:nvPr/>
+        </p:nvSpPr>
+        <p:spPr>
+          <a:xfrm>
+            <a:off x="411480" y="4617720"/>
+            <a:ext cx="8321040" cy="868680"/>
+          </a:xfrm>
+          <a:prstGeom prst="roundRect">
+            <a:avLst/>
+          </a:prstGeom>
+          <a:solidFill>
+            <a:srgbClr val="161B22"/>
+          </a:solidFill>
+          <a:ln w="12700">
+            <a:solidFill>
+              <a:srgbClr val="30363D"/>
+            </a:solidFill>
+          </a:ln>
+        </p:spPr>
+        <p:style>
+          <a:lnRef idx="1">
+            <a:schemeClr val="accent1"/>
+          </a:lnRef>
+          <a:fillRef idx="3">
+            <a:schemeClr val="accent1"/>
+          </a:fillRef>
+          <a:effectRef idx="2">
+            <a:schemeClr val="accent1"/>
+          </a:effectRef>
+          <a:fontRef idx="minor">
+            <a:schemeClr val="lt1"/>
+          </a:fontRef>
+        </p:style>
+        <p:txBody>
+          <a:bodyPr rtlCol="0" anchor="ctr"/>
+          <a:lstStyle/>
+          <a:p>
+            <a:pPr algn="ctr"/>
+          </a:p>
+        </p:txBody>
+      </p:sp>
+      <p:sp>
+        <p:nvSpPr>
+          <p:cNvPr id="8" name="TextBox 7"/>
           <p:cNvSpPr txBox="1"/>
           <p:nvPr/>
         </p:nvSpPr>
         <p:spPr>
           <a:xfrm>
-            <a:off x="457200" y="4709160"/>
-            <a:ext cx="8229600" cy="731520"/>
+            <a:off x="594360" y="4754880"/>
+            <a:ext cx="7955279" cy="685800"/>
           </a:xfrm>
           <a:prstGeom prst="rect">
             <a:avLst/>
@@ -3616,7 +4135,7 @@
           <a:lstStyle/>
           <a:p>
             <a:pPr>
-              <a:defRPr sz="1400">
+              <a:defRPr sz="1500" b="0">
                 <a:solidFill>
                   <a:srgbClr val="8B949E"/>
                 </a:solidFill>
@@ -3639,6 +4158,14 @@
 <file path=ppt/slides/slide5.xml><?xml version="1.0" encoding="utf-8"?>
 <p:sld xmlns:a="http://schemas.openxmlformats.org/drawingml/2006/main" xmlns:p="http://schemas.openxmlformats.org/presentationml/2006/main" xmlns:r="http://schemas.openxmlformats.org/officeDocument/2006/relationships">
   <p:cSld>
+    <p:bg>
+      <p:bgPr>
+        <a:solidFill>
+          <a:srgbClr val="0D1117"/>
+        </a:solidFill>
+        <a:effectLst/>
+      </p:bgPr>
+    </p:bg>
     <p:spTree>
       <p:nvGrpSpPr>
         <p:cNvPr id="1" name=""/>
@@ -3648,14 +4175,102 @@
       <p:grpSpPr/>
       <p:sp>
         <p:nvSpPr>
-          <p:cNvPr id="2" name="TextBox 1"/>
+          <p:cNvPr id="2" name="Rectangle 1"/>
+          <p:cNvSpPr/>
+          <p:nvPr/>
+        </p:nvSpPr>
+        <p:spPr>
+          <a:xfrm>
+            <a:off x="0" y="0"/>
+            <a:ext cx="9144000" cy="73152"/>
+          </a:xfrm>
+          <a:prstGeom prst="rect">
+            <a:avLst/>
+          </a:prstGeom>
+          <a:solidFill>
+            <a:srgbClr val="F7931A"/>
+          </a:solidFill>
+          <a:ln>
+            <a:noFill/>
+          </a:ln>
+        </p:spPr>
+        <p:style>
+          <a:lnRef idx="1">
+            <a:schemeClr val="accent1"/>
+          </a:lnRef>
+          <a:fillRef idx="3">
+            <a:schemeClr val="accent1"/>
+          </a:fillRef>
+          <a:effectRef idx="2">
+            <a:schemeClr val="accent1"/>
+          </a:effectRef>
+          <a:fontRef idx="minor">
+            <a:schemeClr val="lt1"/>
+          </a:fontRef>
+        </p:style>
+        <p:txBody>
+          <a:bodyPr rtlCol="0" anchor="ctr"/>
+          <a:lstStyle/>
+          <a:p>
+            <a:pPr algn="ctr"/>
+          </a:p>
+        </p:txBody>
+      </p:sp>
+      <p:sp>
+        <p:nvSpPr>
+          <p:cNvPr id="3" name="Rounded Rectangle 2"/>
+          <p:cNvSpPr/>
+          <p:nvPr/>
+        </p:nvSpPr>
+        <p:spPr>
+          <a:xfrm>
+            <a:off x="502920" y="777240"/>
+            <a:ext cx="8138160" cy="5029200"/>
+          </a:xfrm>
+          <a:prstGeom prst="roundRect">
+            <a:avLst/>
+          </a:prstGeom>
+          <a:solidFill>
+            <a:srgbClr val="161B22"/>
+          </a:solidFill>
+          <a:ln w="12700">
+            <a:solidFill>
+              <a:srgbClr val="30363D"/>
+            </a:solidFill>
+          </a:ln>
+        </p:spPr>
+        <p:style>
+          <a:lnRef idx="1">
+            <a:schemeClr val="accent1"/>
+          </a:lnRef>
+          <a:fillRef idx="3">
+            <a:schemeClr val="accent1"/>
+          </a:fillRef>
+          <a:effectRef idx="2">
+            <a:schemeClr val="accent1"/>
+          </a:effectRef>
+          <a:fontRef idx="minor">
+            <a:schemeClr val="lt1"/>
+          </a:fontRef>
+        </p:style>
+        <p:txBody>
+          <a:bodyPr rtlCol="0" anchor="ctr"/>
+          <a:lstStyle/>
+          <a:p>
+            <a:pPr algn="ctr"/>
+          </a:p>
+        </p:txBody>
+      </p:sp>
+      <p:sp>
+        <p:nvSpPr>
+          <p:cNvPr id="4" name="TextBox 3"/>
           <p:cNvSpPr txBox="1"/>
           <p:nvPr/>
         </p:nvSpPr>
         <p:spPr>
           <a:xfrm>
-            <a:off x="731520" y="914400"/>
-            <a:ext cx="7680960" cy="4114800"/>
+            <a:off x="777240" y="1005840"/>
+            <a:ext cx="7589520" cy="4572000"/>
           </a:xfrm>
           <a:prstGeom prst="rect">
             <a:avLst/>
@@ -3669,89 +4284,89 @@
           <a:lstStyle/>
           <a:p>
             <a:pPr>
-              <a:defRPr sz="3600" b="1">
+              <a:defRPr sz="3800" b="1">
+                <a:solidFill>
+                  <a:srgbClr val="F7931A"/>
+                </a:solidFill>
+              </a:defRPr>
+            </a:pPr>
+            <a:r>
+              <a:t>Takeaway</a:t>
+            </a:r>
+          </a:p>
+          <a:p>
+            <a:pPr>
+              <a:spcBef>
+                <a:spcPts val="1200"/>
+              </a:spcBef>
+              <a:defRPr sz="2100">
                 <a:solidFill>
                   <a:srgbClr val="E6EDF3"/>
                 </a:solidFill>
               </a:defRPr>
             </a:pPr>
             <a:r>
-              <a:t>Takeaway</a:t>
+              <a:t>• Schema in context is not enough for free LLMs</a:t>
             </a:r>
           </a:p>
           <a:p>
             <a:pPr>
               <a:spcBef>
-                <a:spcPts val="1000"/>
+                <a:spcPts val="1200"/>
               </a:spcBef>
-              <a:defRPr sz="2000">
+              <a:defRPr sz="2100">
                 <a:solidFill>
-                  <a:srgbClr val="C9D1D9"/>
+                  <a:srgbClr val="E6EDF3"/>
                 </a:solidFill>
               </a:defRPr>
             </a:pPr>
             <a:r>
-              <a:t>Schema in context is not enough for free LLMs</a:t>
+              <a:t>• Failures: wrong column, wrong aggregation, wrong enum</a:t>
             </a:r>
           </a:p>
           <a:p>
             <a:pPr>
               <a:spcBef>
-                <a:spcPts val="1000"/>
+                <a:spcPts val="1200"/>
               </a:spcBef>
-              <a:defRPr sz="2000">
+              <a:defRPr sz="2100">
                 <a:solidFill>
-                  <a:srgbClr val="C9D1D9"/>
+                  <a:srgbClr val="E6EDF3"/>
                 </a:solidFill>
               </a:defRPr>
             </a:pPr>
             <a:r>
-              <a:t>Failures: wrong column, wrong aggregation, wrong enum</a:t>
+              <a:t>• Wrong SQL can still execute and look plausible</a:t>
             </a:r>
           </a:p>
           <a:p>
             <a:pPr>
               <a:spcBef>
-                <a:spcPts val="1000"/>
+                <a:spcPts val="1200"/>
               </a:spcBef>
-              <a:defRPr sz="2000">
+              <a:defRPr sz="2100">
                 <a:solidFill>
-                  <a:srgbClr val="C9D1D9"/>
+                  <a:srgbClr val="E6EDF3"/>
                 </a:solidFill>
               </a:defRPr>
             </a:pPr>
             <a:r>
-              <a:t>Wrong SQL can still execute and look plausible</a:t>
+              <a:t>• Golden SQL tests (12/12) validate the database; live LLM is the weak link</a:t>
             </a:r>
           </a:p>
           <a:p>
             <a:pPr>
               <a:spcBef>
-                <a:spcPts val="1000"/>
+                <a:spcPts val="1200"/>
               </a:spcBef>
-              <a:defRPr sz="2000">
+              <a:defRPr sz="2100">
                 <a:solidFill>
-                  <a:srgbClr val="C9D1D9"/>
+                  <a:srgbClr val="E6EDF3"/>
                 </a:solidFill>
               </a:defRPr>
             </a:pPr>
             <a:r>
-              <a:t>Golden SQL tests (12/12) validate the database; live LLM is the weak link</a:t>
-            </a:r>
-          </a:p>
-          <a:p>
-            <a:pPr>
-              <a:spcBef>
-                <a:spcPts val="1000"/>
-              </a:spcBef>
-              <a:defRPr sz="2000">
-                <a:solidFill>
-                  <a:srgbClr val="C9D1D9"/>
-                </a:solidFill>
-              </a:defRPr>
-            </a:pPr>
-            <a:r>
-              <a:t>Block Explorer AI · Text-to-SQL/</a:t>
+              <a:t>• Block Explorer AI · Text-to-SQL/</a:t>
             </a:r>
           </a:p>
         </p:txBody>
